--- a/slides/presentation.pptx
+++ b/slides/presentation.pptx
@@ -5251,7 +5251,7 @@
               </a:defRPr>
             </a:pPr>
             <a:r>
-              <a:t>[Student Name]   [Roll Number]</a:t>
+              <a:t>Shiveshwar Kumar Sah   BL.EN.U4CSE23072</a:t>
             </a:r>
           </a:p>
           <a:p>
